--- a/Assets/stencilAR_splash.pptx
+++ b/Assets/stencilAR_splash.pptx
@@ -261,7 +261,7 @@
           <a:p>
             <a:fld id="{4EDB8F22-4513-4AA5-8BD0-2A33888E1232}" type="datetimeFigureOut">
               <a:rPr lang="en-GB" smtClean="0"/>
-              <a:t>03/03/2024</a:t>
+              <a:t>20/09/2024</a:t>
             </a:fld>
             <a:endParaRPr lang="en-GB"/>
           </a:p>
@@ -461,7 +461,7 @@
           <a:p>
             <a:fld id="{4EDB8F22-4513-4AA5-8BD0-2A33888E1232}" type="datetimeFigureOut">
               <a:rPr lang="en-GB" smtClean="0"/>
-              <a:t>03/03/2024</a:t>
+              <a:t>20/09/2024</a:t>
             </a:fld>
             <a:endParaRPr lang="en-GB"/>
           </a:p>
@@ -671,7 +671,7 @@
           <a:p>
             <a:fld id="{4EDB8F22-4513-4AA5-8BD0-2A33888E1232}" type="datetimeFigureOut">
               <a:rPr lang="en-GB" smtClean="0"/>
-              <a:t>03/03/2024</a:t>
+              <a:t>20/09/2024</a:t>
             </a:fld>
             <a:endParaRPr lang="en-GB"/>
           </a:p>
@@ -871,7 +871,7 @@
           <a:p>
             <a:fld id="{4EDB8F22-4513-4AA5-8BD0-2A33888E1232}" type="datetimeFigureOut">
               <a:rPr lang="en-GB" smtClean="0"/>
-              <a:t>03/03/2024</a:t>
+              <a:t>20/09/2024</a:t>
             </a:fld>
             <a:endParaRPr lang="en-GB"/>
           </a:p>
@@ -1147,7 +1147,7 @@
           <a:p>
             <a:fld id="{4EDB8F22-4513-4AA5-8BD0-2A33888E1232}" type="datetimeFigureOut">
               <a:rPr lang="en-GB" smtClean="0"/>
-              <a:t>03/03/2024</a:t>
+              <a:t>20/09/2024</a:t>
             </a:fld>
             <a:endParaRPr lang="en-GB"/>
           </a:p>
@@ -1415,7 +1415,7 @@
           <a:p>
             <a:fld id="{4EDB8F22-4513-4AA5-8BD0-2A33888E1232}" type="datetimeFigureOut">
               <a:rPr lang="en-GB" smtClean="0"/>
-              <a:t>03/03/2024</a:t>
+              <a:t>20/09/2024</a:t>
             </a:fld>
             <a:endParaRPr lang="en-GB"/>
           </a:p>
@@ -1830,7 +1830,7 @@
           <a:p>
             <a:fld id="{4EDB8F22-4513-4AA5-8BD0-2A33888E1232}" type="datetimeFigureOut">
               <a:rPr lang="en-GB" smtClean="0"/>
-              <a:t>03/03/2024</a:t>
+              <a:t>20/09/2024</a:t>
             </a:fld>
             <a:endParaRPr lang="en-GB"/>
           </a:p>
@@ -1972,7 +1972,7 @@
           <a:p>
             <a:fld id="{4EDB8F22-4513-4AA5-8BD0-2A33888E1232}" type="datetimeFigureOut">
               <a:rPr lang="en-GB" smtClean="0"/>
-              <a:t>03/03/2024</a:t>
+              <a:t>20/09/2024</a:t>
             </a:fld>
             <a:endParaRPr lang="en-GB"/>
           </a:p>
@@ -2085,7 +2085,7 @@
           <a:p>
             <a:fld id="{4EDB8F22-4513-4AA5-8BD0-2A33888E1232}" type="datetimeFigureOut">
               <a:rPr lang="en-GB" smtClean="0"/>
-              <a:t>03/03/2024</a:t>
+              <a:t>20/09/2024</a:t>
             </a:fld>
             <a:endParaRPr lang="en-GB"/>
           </a:p>
@@ -2398,7 +2398,7 @@
           <a:p>
             <a:fld id="{4EDB8F22-4513-4AA5-8BD0-2A33888E1232}" type="datetimeFigureOut">
               <a:rPr lang="en-GB" smtClean="0"/>
-              <a:t>03/03/2024</a:t>
+              <a:t>20/09/2024</a:t>
             </a:fld>
             <a:endParaRPr lang="en-GB"/>
           </a:p>
@@ -2687,7 +2687,7 @@
           <a:p>
             <a:fld id="{4EDB8F22-4513-4AA5-8BD0-2A33888E1232}" type="datetimeFigureOut">
               <a:rPr lang="en-GB" smtClean="0"/>
-              <a:t>03/03/2024</a:t>
+              <a:t>20/09/2024</a:t>
             </a:fld>
             <a:endParaRPr lang="en-GB"/>
           </a:p>
@@ -2930,7 +2930,7 @@
           <a:p>
             <a:fld id="{4EDB8F22-4513-4AA5-8BD0-2A33888E1232}" type="datetimeFigureOut">
               <a:rPr lang="en-GB" smtClean="0"/>
-              <a:t>03/03/2024</a:t>
+              <a:t>20/09/2024</a:t>
             </a:fld>
             <a:endParaRPr lang="en-GB"/>
           </a:p>
@@ -3349,74 +3349,20 @@
       </p:grpSpPr>
       <p:sp>
         <p:nvSpPr>
-          <p:cNvPr id="15" name="Rectangle 14">
-            <a:extLst>
-              <a:ext uri="{FF2B5EF4-FFF2-40B4-BE49-F238E27FC236}">
-                <a16:creationId xmlns:a16="http://schemas.microsoft.com/office/drawing/2014/main" id="{A7144254-7985-4C9A-CAC0-0F2A0E97507F}"/>
-              </a:ext>
-            </a:extLst>
-          </p:cNvPr>
-          <p:cNvSpPr/>
+          <p:cNvPr id="9" name="TextBox 8">
+            <a:extLst>
+              <a:ext uri="{FF2B5EF4-FFF2-40B4-BE49-F238E27FC236}">
+                <a16:creationId xmlns:a16="http://schemas.microsoft.com/office/drawing/2014/main" id="{589AC59F-6B04-9286-9738-B453413CF45E}"/>
+              </a:ext>
+            </a:extLst>
+          </p:cNvPr>
+          <p:cNvSpPr txBox="1"/>
           <p:nvPr/>
         </p:nvSpPr>
         <p:spPr>
           <a:xfrm>
-            <a:off x="756000" y="397820"/>
-            <a:ext cx="7675200" cy="4755968"/>
-          </a:xfrm>
-          <a:prstGeom prst="rect">
-            <a:avLst/>
-          </a:prstGeom>
-          <a:solidFill>
-            <a:srgbClr val="FDFDFE"/>
-          </a:solidFill>
-          <a:ln>
-            <a:solidFill>
-              <a:schemeClr val="tx1"/>
-            </a:solidFill>
-          </a:ln>
-        </p:spPr>
-        <p:style>
-          <a:lnRef idx="2">
-            <a:schemeClr val="accent1">
-              <a:shade val="15000"/>
-            </a:schemeClr>
-          </a:lnRef>
-          <a:fillRef idx="1">
-            <a:schemeClr val="accent1"/>
-          </a:fillRef>
-          <a:effectRef idx="0">
-            <a:schemeClr val="accent1"/>
-          </a:effectRef>
-          <a:fontRef idx="minor">
-            <a:schemeClr val="lt1"/>
-          </a:fontRef>
-        </p:style>
-        <p:txBody>
-          <a:bodyPr rtlCol="0" anchor="ctr"/>
-          <a:lstStyle/>
-          <a:p>
-            <a:pPr algn="ctr"/>
-            <a:endParaRPr lang="en-GB" dirty="0"/>
-          </a:p>
-        </p:txBody>
-      </p:sp>
-      <p:sp>
-        <p:nvSpPr>
-          <p:cNvPr id="9" name="TextBox 8">
-            <a:extLst>
-              <a:ext uri="{FF2B5EF4-FFF2-40B4-BE49-F238E27FC236}">
-                <a16:creationId xmlns:a16="http://schemas.microsoft.com/office/drawing/2014/main" id="{589AC59F-6B04-9286-9738-B453413CF45E}"/>
-              </a:ext>
-            </a:extLst>
-          </p:cNvPr>
-          <p:cNvSpPr txBox="1"/>
-          <p:nvPr/>
-        </p:nvSpPr>
-        <p:spPr>
-          <a:xfrm>
-            <a:off x="3235188" y="996141"/>
-            <a:ext cx="3234541" cy="430887"/>
+            <a:off x="2719465" y="1000407"/>
+            <a:ext cx="4345654" cy="584775"/>
           </a:xfrm>
           <a:prstGeom prst="rect">
             <a:avLst/>
@@ -3430,16 +3376,16 @@
           <a:lstStyle/>
           <a:p>
             <a:r>
-              <a:rPr lang="en-GB" sz="1100" dirty="0"/>
+              <a:rPr lang="en-GB" sz="1600" dirty="0"/>
               <a:t>Created by Andy Woods and Jackson Moore</a:t>
             </a:r>
           </a:p>
           <a:p>
             <a:r>
-              <a:rPr lang="en-GB" sz="1100" dirty="0"/>
+              <a:rPr lang="en-GB" sz="1600" dirty="0"/>
               <a:t>Opensource github.com/andytwoods/StencilAR</a:t>
             </a:r>
-            <a:endParaRPr lang="en-GB" sz="800" dirty="0"/>
+            <a:endParaRPr lang="en-GB" sz="1050" dirty="0"/>
           </a:p>
         </p:txBody>
       </p:sp>
@@ -3472,7 +3418,7 @@
         </p:blipFill>
         <p:spPr bwMode="auto">
           <a:xfrm>
-            <a:off x="6039534" y="959767"/>
+            <a:off x="7434591" y="946727"/>
             <a:ext cx="457237" cy="457237"/>
           </a:xfrm>
           <a:prstGeom prst="rect">
@@ -3504,8 +3450,8 @@
         </p:nvSpPr>
         <p:spPr>
           <a:xfrm>
-            <a:off x="3119081" y="340474"/>
-            <a:ext cx="3538769" cy="830997"/>
+            <a:off x="2900728" y="243797"/>
+            <a:ext cx="4991100" cy="1015663"/>
           </a:xfrm>
           <a:prstGeom prst="rect">
             <a:avLst/>
@@ -3519,7 +3465,7 @@
           <a:lstStyle/>
           <a:p>
             <a:r>
-              <a:rPr lang="en-GB" sz="4800" dirty="0">
+              <a:rPr lang="en-GB" sz="6000" dirty="0">
                 <a:latin typeface="ADLaM Display" panose="020F0502020204030204" pitchFamily="2" charset="0"/>
                 <a:ea typeface="ADLaM Display" panose="020F0502020204030204" pitchFamily="2" charset="0"/>
                 <a:cs typeface="ADLaM Display" panose="020F0502020204030204" pitchFamily="2" charset="0"/>
@@ -3527,7 +3473,7 @@
               <a:t>Stencil </a:t>
             </a:r>
             <a:r>
-              <a:rPr lang="en-GB" sz="4800" b="1" dirty="0">
+              <a:rPr lang="en-GB" sz="6000" b="1" dirty="0">
                 <a:ln w="22225">
                   <a:solidFill>
                     <a:schemeClr val="tx1"/>
@@ -3572,7 +3518,7 @@
         </p:blipFill>
         <p:spPr bwMode="auto">
           <a:xfrm>
-            <a:off x="2900728" y="1060579"/>
+            <a:off x="1496663" y="1013330"/>
             <a:ext cx="334459" cy="324032"/>
           </a:xfrm>
           <a:prstGeom prst="rect">
@@ -3592,10 +3538,10 @@
       </p:pic>
       <p:sp>
         <p:nvSpPr>
-          <p:cNvPr id="14" name="TextBox 13">
-            <a:extLst>
-              <a:ext uri="{FF2B5EF4-FFF2-40B4-BE49-F238E27FC236}">
-                <a16:creationId xmlns:a16="http://schemas.microsoft.com/office/drawing/2014/main" id="{0A5628BE-6BBA-A1FF-C0E8-9B2FFD16EF09}"/>
+          <p:cNvPr id="17" name="TextBox 16">
+            <a:extLst>
+              <a:ext uri="{FF2B5EF4-FFF2-40B4-BE49-F238E27FC236}">
+                <a16:creationId xmlns:a16="http://schemas.microsoft.com/office/drawing/2014/main" id="{8BB5F852-DDA9-67B8-C4AF-CBD922474D1B}"/>
               </a:ext>
             </a:extLst>
           </p:cNvPr>
@@ -3604,8 +3550,8 @@
         </p:nvSpPr>
         <p:spPr>
           <a:xfrm>
-            <a:off x="2776809" y="1378673"/>
-            <a:ext cx="3881037" cy="184666"/>
+            <a:off x="2352676" y="4812552"/>
+            <a:ext cx="4712444" cy="307777"/>
           </a:xfrm>
           <a:prstGeom prst="rect">
             <a:avLst/>
@@ -3619,42 +3565,7 @@
           <a:lstStyle/>
           <a:p>
             <a:r>
-              <a:rPr lang="en-GB" sz="600" dirty="0"/>
-              <a:t>opensource initiative logo			GitHub logo (for source code)</a:t>
-            </a:r>
-          </a:p>
-        </p:txBody>
-      </p:sp>
-      <p:sp>
-        <p:nvSpPr>
-          <p:cNvPr id="17" name="TextBox 16">
-            <a:extLst>
-              <a:ext uri="{FF2B5EF4-FFF2-40B4-BE49-F238E27FC236}">
-                <a16:creationId xmlns:a16="http://schemas.microsoft.com/office/drawing/2014/main" id="{8BB5F852-DDA9-67B8-C4AF-CBD922474D1B}"/>
-              </a:ext>
-            </a:extLst>
-          </p:cNvPr>
-          <p:cNvSpPr txBox="1"/>
-          <p:nvPr/>
-        </p:nvSpPr>
-        <p:spPr>
-          <a:xfrm>
-            <a:off x="3184082" y="4812552"/>
-            <a:ext cx="3881037" cy="230832"/>
-          </a:xfrm>
-          <a:prstGeom prst="rect">
-            <a:avLst/>
-          </a:prstGeom>
-          <a:noFill/>
-        </p:spPr>
-        <p:txBody>
-          <a:bodyPr wrap="square">
-            <a:spAutoFit/>
-          </a:bodyPr>
-          <a:lstStyle/>
-          <a:p>
-            <a:r>
-              <a:rPr lang="en-GB" sz="900" dirty="0"/>
+              <a:rPr lang="en-GB" sz="1400" dirty="0"/>
               <a:t>Image via https://huggingface.co/ByteDance/SDXL-Lightning</a:t>
             </a:r>
           </a:p>
